--- a/outils/affiches/ecran-programme-caa.pptx
+++ b/outils/affiches/ecran-programme-caa.pptx
@@ -3939,7 +3939,7 @@
                 </a:solidFill>
                 <a:latin typeface="Poppins"/>
               </a:rPr>
-              <a:t>Vidéo TESTY — libre service</a:t>
+              <a:t>Mini-Série TESTY</a:t>
             </a:r>
           </a:p>
         </p:txBody>
